--- a/plugins/meridian-trust/skills/meridian-business-case/assets/Stage1_Proposal_Template.pptx
+++ b/plugins/meridian-trust/skills/meridian-business-case/assets/Stage1_Proposal_Template.pptx
@@ -3107,7 +3107,7 @@
             <a:avLst/>
           </a:prstGeom>
           <a:solidFill>
-            <a:srgbClr val="F4F6F7"/>
+            <a:srgbClr val="052540"/>
           </a:solidFill>
           <a:ln>
             <a:noFill/>
@@ -3136,20 +3136,20 @@
       </p:sp>
       <p:sp>
         <p:nvSpPr>
-          <p:cNvPr id="3" name="Rectangle 2"/>
+          <p:cNvPr id="3" name="Meridian line"/>
           <p:cNvSpPr/>
           <p:nvPr/>
         </p:nvSpPr>
         <p:spPr>
           <a:xfrm>
-            <a:off x="0" y="0"/>
-            <a:ext cx="201168" cy="6858000"/>
+            <a:off x="914400" y="2505456"/>
+            <a:ext cx="548640" cy="54864"/>
           </a:xfrm>
           <a:prstGeom prst="rect">
             <a:avLst/>
           </a:prstGeom>
           <a:solidFill>
-            <a:srgbClr val="0B4F80"/>
+            <a:srgbClr val="00A3C4"/>
           </a:solidFill>
           <a:ln>
             <a:noFill/>
@@ -3224,9 +3224,9 @@
           <a:p>
             <a:pPr algn="l"/>
             <a:r>
-              <a:rPr sz="3200" b="0" i="0">
-                <a:solidFill>
-                  <a:srgbClr val="0B4F80"/>
+              <a:rPr sz="3200" b="1" i="0">
+                <a:solidFill>
+                  <a:srgbClr val="FFFFFF"/>
                 </a:solidFill>
                 <a:latin typeface="Arial"/>
               </a:rPr>
@@ -3261,7 +3261,7 @@
             <a:r>
               <a:rPr sz="2400" b="0" i="0">
                 <a:solidFill>
-                  <a:srgbClr val="3A3F44"/>
+                  <a:srgbClr val="D9DDE0"/>
                 </a:solidFill>
                 <a:latin typeface="Arial"/>
               </a:rPr>
@@ -3300,7 +3300,7 @@
             <a:r>
               <a:rPr sz="1100" b="0" i="0">
                 <a:solidFill>
-                  <a:srgbClr val="6B7278"/>
+                  <a:srgbClr val="9AA1A7"/>
                 </a:solidFill>
                 <a:latin typeface="Arial"/>
               </a:rPr>
@@ -3316,7 +3316,7 @@
             <a:r>
               <a:rPr sz="1100" b="0" i="0">
                 <a:solidFill>
-                  <a:srgbClr val="6B7278"/>
+                  <a:srgbClr val="9AA1A7"/>
                 </a:solidFill>
                 <a:latin typeface="Arial"/>
               </a:rPr>
@@ -3332,7 +3332,7 @@
             <a:r>
               <a:rPr sz="1100" b="0" i="0">
                 <a:solidFill>
-                  <a:srgbClr val="6B7278"/>
+                  <a:srgbClr val="9AA1A7"/>
                 </a:solidFill>
                 <a:latin typeface="Arial"/>
               </a:rPr>
@@ -3385,7 +3385,7 @@
             <a:r>
               <a:rPr sz="900" b="0" i="0">
                 <a:solidFill>
-                  <a:srgbClr val="6B7278"/>
+                  <a:srgbClr val="0B4F80"/>
                 </a:solidFill>
                 <a:latin typeface="Arial"/>
               </a:rPr>
@@ -3532,6 +3532,33 @@
       </p:sp>
       <p:sp>
         <p:nvSpPr>
+          <p:cNvPr id="31" name="Meridian line"/>
+          <p:cNvSpPr/>
+          <p:nvPr/>
+        </p:nvSpPr>
+        <p:spPr>
+          <a:xfrm>
+            <a:off x="457200" y="1240536"/>
+            <a:ext cx="548640" cy="54864"/>
+          </a:xfrm>
+          <a:prstGeom prst="rect">
+            <a:avLst/>
+          </a:prstGeom>
+          <a:solidFill>
+            <a:srgbClr val="00A3C4"/>
+          </a:solidFill>
+          <a:ln>
+            <a:noFill/>
+          </a:ln>
+        </p:spPr>
+        <p:txBody>
+          <a:bodyPr rtlCol="0" anchor="ctr"/>
+          <a:lstStyle/>
+          <a:p/>
+        </p:txBody>
+      </p:sp>
+      <p:sp>
+        <p:nvSpPr>
           <p:cNvPr id="7" name="TextBox 6"/>
           <p:cNvSpPr txBox="1"/>
           <p:nvPr/>
@@ -3595,7 +3622,7 @@
                 </a:solidFill>
                 <a:latin typeface="Arial"/>
               </a:rPr>
-              <a:t>Meridian Bank | Internal</a:t>
+              <a:t>Meridian Trust | Internal</a:t>
             </a:r>
           </a:p>
         </p:txBody>
@@ -5382,6 +5409,33 @@
       </p:sp>
       <p:sp>
         <p:nvSpPr>
+          <p:cNvPr id="22" name="Meridian line"/>
+          <p:cNvSpPr/>
+          <p:nvPr/>
+        </p:nvSpPr>
+        <p:spPr>
+          <a:xfrm>
+            <a:off x="457200" y="1240536"/>
+            <a:ext cx="548640" cy="54864"/>
+          </a:xfrm>
+          <a:prstGeom prst="rect">
+            <a:avLst/>
+          </a:prstGeom>
+          <a:solidFill>
+            <a:srgbClr val="00A3C4"/>
+          </a:solidFill>
+          <a:ln>
+            <a:noFill/>
+          </a:ln>
+        </p:spPr>
+        <p:txBody>
+          <a:bodyPr rtlCol="0" anchor="ctr"/>
+          <a:lstStyle/>
+          <a:p/>
+        </p:txBody>
+      </p:sp>
+      <p:sp>
+        <p:nvSpPr>
           <p:cNvPr id="7" name="TextBox 6"/>
           <p:cNvSpPr txBox="1"/>
           <p:nvPr/>
@@ -5445,7 +5499,7 @@
                 </a:solidFill>
                 <a:latin typeface="Arial"/>
               </a:rPr>
-              <a:t>Meridian Bank | Internal</a:t>
+              <a:t>Meridian Trust | Internal</a:t>
             </a:r>
           </a:p>
         </p:txBody>
@@ -6337,6 +6391,33 @@
       </p:sp>
       <p:sp>
         <p:nvSpPr>
+          <p:cNvPr id="21" name="Meridian line"/>
+          <p:cNvSpPr/>
+          <p:nvPr/>
+        </p:nvSpPr>
+        <p:spPr>
+          <a:xfrm>
+            <a:off x="457200" y="929640"/>
+            <a:ext cx="548640" cy="54864"/>
+          </a:xfrm>
+          <a:prstGeom prst="rect">
+            <a:avLst/>
+          </a:prstGeom>
+          <a:solidFill>
+            <a:srgbClr val="00A3C4"/>
+          </a:solidFill>
+          <a:ln>
+            <a:noFill/>
+          </a:ln>
+        </p:spPr>
+        <p:txBody>
+          <a:bodyPr rtlCol="0" anchor="ctr"/>
+          <a:lstStyle/>
+          <a:p/>
+        </p:txBody>
+      </p:sp>
+      <p:sp>
+        <p:nvSpPr>
           <p:cNvPr id="6" name="TextBox 5"/>
           <p:cNvSpPr txBox="1"/>
           <p:nvPr/>
@@ -6400,7 +6481,7 @@
                 </a:solidFill>
                 <a:latin typeface="Arial"/>
               </a:rPr>
-              <a:t>Meridian Bank | Internal</a:t>
+              <a:t>Meridian Trust | Internal</a:t>
             </a:r>
           </a:p>
         </p:txBody>
@@ -7327,6 +7408,33 @@
       </p:sp>
       <p:sp>
         <p:nvSpPr>
+          <p:cNvPr id="14" name="Meridian line"/>
+          <p:cNvSpPr/>
+          <p:nvPr/>
+        </p:nvSpPr>
+        <p:spPr>
+          <a:xfrm>
+            <a:off x="457200" y="1240536"/>
+            <a:ext cx="548640" cy="54864"/>
+          </a:xfrm>
+          <a:prstGeom prst="rect">
+            <a:avLst/>
+          </a:prstGeom>
+          <a:solidFill>
+            <a:srgbClr val="00A3C4"/>
+          </a:solidFill>
+          <a:ln>
+            <a:noFill/>
+          </a:ln>
+        </p:spPr>
+        <p:txBody>
+          <a:bodyPr rtlCol="0" anchor="ctr"/>
+          <a:lstStyle/>
+          <a:p/>
+        </p:txBody>
+      </p:sp>
+      <p:sp>
+        <p:nvSpPr>
           <p:cNvPr id="7" name="TextBox 6"/>
           <p:cNvSpPr txBox="1"/>
           <p:nvPr/>
@@ -7390,7 +7498,7 @@
                 </a:solidFill>
                 <a:latin typeface="Arial"/>
               </a:rPr>
-              <a:t>Meridian Bank | Internal</a:t>
+              <a:t>Meridian Trust | Internal</a:t>
             </a:r>
           </a:p>
         </p:txBody>
@@ -8425,39 +8533,39 @@
         <a:sysClr val="window" lastClr="FFFFFF"/>
       </a:lt1>
       <a:dk2>
-        <a:srgbClr val="1F497D"/>
+        <a:srgbClr val="052540"/>
       </a:dk2>
       <a:lt2>
-        <a:srgbClr val="EEECE1"/>
+        <a:srgbClr val="F4F6F7"/>
       </a:lt2>
       <a:accent1>
-        <a:srgbClr val="4F81BD"/>
+        <a:srgbClr val="0B4F80"/>
       </a:accent1>
       <a:accent2>
-        <a:srgbClr val="C0504D"/>
+        <a:srgbClr val="2F80B8"/>
       </a:accent2>
       <a:accent3>
-        <a:srgbClr val="9BBB59"/>
+        <a:srgbClr val="00A3C4"/>
       </a:accent3>
       <a:accent4>
-        <a:srgbClr val="8064A2"/>
+        <a:srgbClr val="E08A2E"/>
       </a:accent4>
       <a:accent5>
-        <a:srgbClr val="4BACC6"/>
+        <a:srgbClr val="157A55"/>
       </a:accent5>
       <a:accent6>
-        <a:srgbClr val="F79646"/>
+        <a:srgbClr val="9AA1A7"/>
       </a:accent6>
       <a:hlink>
-        <a:srgbClr val="0000FF"/>
+        <a:srgbClr val="0B4F80"/>
       </a:hlink>
       <a:folHlink>
-        <a:srgbClr val="800080"/>
+        <a:srgbClr val="7C9BB8"/>
       </a:folHlink>
     </a:clrScheme>
     <a:fontScheme name="Office">
       <a:majorFont>
-        <a:latin typeface="Calibri"/>
+        <a:latin typeface="Arial"/>
         <a:ea typeface=""/>
         <a:cs typeface=""/>
         <a:font script="Jpan" typeface="ＭＳ Ｐゴシック"/>
@@ -8492,7 +8600,7 @@
         <a:font script="Geor" typeface="Sylfaen"/>
       </a:majorFont>
       <a:minorFont>
-        <a:latin typeface="Calibri"/>
+        <a:latin typeface="Arial"/>
         <a:ea typeface=""/>
         <a:cs typeface=""/>
         <a:font script="Jpan" typeface="ＭＳ Ｐゴシック"/>
